--- a/docs/10-product/원본-공모전제출/기능설명서_작성본.pptx
+++ b/docs/10-product/원본-공모전제출/기능설명서_작성본.pptx
@@ -13852,7 +13852,7 @@
                             <a:schemeClr val="tx1"/>
                           </a:solidFill>
                         </a:rPr>
-                        <a:t>기존 오버투어리즘 대응 서비스 대다수가 '명소 A 대신 B' 단순 대체 추천에 그치는 것과 달리, 본 서비스는 성지 208곳의 전국 분산·한적함이라는 특성과 TourAPI 실시간 데이터를 결합해 '혼잡 명소를 경유하되 한적한 성지를 엮은 완결 코스'를 제안한다. 특히 축제·명소 데이터를 매일 재계산하는 '오늘의 쉼표' 붐빔 지수는 정적 추천이 아니라 그날그날 달라지는 실시간 분산 추천이라는 점에서 차별적이다.</a:t>
+                        <a:t>가톨릭 길동무(GPS 기반 현장 탐색·순례 기록)나 서울 순례길(서울 24개 공식 코스)처럼 '이미 정해진 성지를 어떻게 잘 찾아가고 기록하는가'에 강점을 가진 서비스와는 다른 질문에서 출발한다 — 본 서비스는 '오늘 어디가 한적한가'를 먼저 묻는다. 성지 208곳의 전국 분산·한적함과 TourAPI 실시간 데이터를 결합해, 혼잡 명소를 경유하되 그 옆의 한적한 성지를 엮은 완결 코스를 제안하고, 축제·명소 데이터를 매일 재계산하는 '오늘의 쉼표' 붐빔 지수로 정적 추천이 아닌 그날그날 달라지는 실시간 분산 추천을 제공한다. TripCatholic처럼 세계 성지를 다루는 글로벌 서비스나 Wise Pilgrim 같은 도보길 오프라인 특화 서비스와도 다르게, 한국 성지 데이터의 깊이와 한국관광공사 관광정보 연계라는 국내 특화 영역에 집중한다.</a:t>
                       </a:r>
                     </a:p>
                   </a:txBody>
